--- a/IITBBS_Impact_Dissipating_Crash_Barrier_Internal_Confidential.pptx
+++ b/IITBBS_Impact_Dissipating_Crash_Barrier_Internal_Confidential.pptx
@@ -5491,12 +5491,24 @@
       </p:grpSpPr>
       <p:sp>
         <p:nvSpPr>
-          <p:cNvPr id="2" name="Notes Placeholder 2"/>
+          <p:cNvPr id="2" name="Slide Image Placeholder 1"/>
+          <p:cNvSpPr>
+            <a:spLocks noGrp="1" noRot="1" noChangeAspect="1"/>
+          </p:cNvSpPr>
+          <p:nvPr>
+            <p:ph type="sldImg" idx="2"/>
+          </p:nvPr>
+        </p:nvSpPr>
+        <p:spPr/>
+      </p:sp>
+      <p:sp>
+        <p:nvSpPr>
+          <p:cNvPr id="3" name="Notes Placeholder 2"/>
           <p:cNvSpPr>
             <a:spLocks noGrp="1"/>
           </p:cNvSpPr>
           <p:nvPr>
-            <p:ph type="body" idx="1"/>
+            <p:ph type="body" sz="quarter" idx="3"/>
           </p:nvPr>
         </p:nvSpPr>
         <p:spPr/>
@@ -5592,6 +5604,18 @@
             </a:r>
           </a:p>
         </p:txBody>
+      </p:sp>
+      <p:sp>
+        <p:nvSpPr>
+          <p:cNvPr id="4" name="Slide Number Placeholder 3"/>
+          <p:cNvSpPr>
+            <a:spLocks noGrp="1"/>
+          </p:cNvSpPr>
+          <p:nvPr>
+            <p:ph type="sldNum" sz="quarter" idx="5"/>
+          </p:nvPr>
+        </p:nvSpPr>
+        <p:spPr/>
       </p:sp>
     </p:spTree>
   </p:cSld>
@@ -10565,7 +10589,7 @@
         <p159:morph option="byObject"/>
       </p:transition>
     </mc:Choice>
-    <mc:Fallback xmlns="">
+    <mc:Fallback>
       <p:transition>
         <p:fade/>
       </p:transition>
@@ -11531,7 +11555,7 @@
         <p159:morph option="byObject"/>
       </p:transition>
     </mc:Choice>
-    <mc:Fallback xmlns="">
+    <mc:Fallback>
       <p:transition>
         <p:fade/>
       </p:transition>
@@ -12773,7 +12797,7 @@
         <p159:morph option="byObject"/>
       </p:transition>
     </mc:Choice>
-    <mc:Fallback xmlns="">
+    <mc:Fallback>
       <p:transition>
         <p:fade/>
       </p:transition>
@@ -13748,7 +13772,7 @@
         <p159:morph option="byObject"/>
       </p:transition>
     </mc:Choice>
-    <mc:Fallback xmlns="">
+    <mc:Fallback>
       <p:transition>
         <p:fade/>
       </p:transition>
@@ -14692,7 +14716,7 @@
         <p159:morph option="byObject"/>
       </p:transition>
     </mc:Choice>
-    <mc:Fallback xmlns="">
+    <mc:Fallback>
       <p:transition>
         <p:fade/>
       </p:transition>
@@ -15877,7 +15901,7 @@
         <p159:morph option="byObject"/>
       </p:transition>
     </mc:Choice>
-    <mc:Fallback xmlns="">
+    <mc:Fallback>
       <p:transition>
         <p:fade/>
       </p:transition>
@@ -17508,7 +17532,7 @@
         <p159:morph option="byObject"/>
       </p:transition>
     </mc:Choice>
-    <mc:Fallback xmlns="">
+    <mc:Fallback>
       <p:transition>
         <p:fade/>
       </p:transition>
@@ -18878,7 +18902,7 @@
         <p159:morph option="byObject"/>
       </p:transition>
     </mc:Choice>
-    <mc:Fallback xmlns="">
+    <mc:Fallback>
       <p:transition>
         <p:fade/>
       </p:transition>
@@ -20175,7 +20199,7 @@
         <p159:morph option="byObject"/>
       </p:transition>
     </mc:Choice>
-    <mc:Fallback xmlns="">
+    <mc:Fallback>
       <p:transition>
         <p:fade/>
       </p:transition>
@@ -21451,7 +21475,7 @@
         <p159:morph option="byObject"/>
       </p:transition>
     </mc:Choice>
-    <mc:Fallback xmlns="">
+    <mc:Fallback>
       <p:transition>
         <p:fade/>
       </p:transition>
@@ -22614,7 +22638,7 @@
         <p159:morph option="byObject"/>
       </p:transition>
     </mc:Choice>
-    <mc:Fallback xmlns="">
+    <mc:Fallback>
       <p:transition>
         <p:fade/>
       </p:transition>
@@ -24306,7 +24330,7 @@
         <p159:morph option="byObject"/>
       </p:transition>
     </mc:Choice>
-    <mc:Fallback xmlns="">
+    <mc:Fallback>
       <p:transition>
         <p:fade/>
       </p:transition>
@@ -29679,7 +29703,7 @@
         <p159:morph option="byObject"/>
       </p:transition>
     </mc:Choice>
-    <mc:Fallback xmlns="">
+    <mc:Fallback>
       <p:transition>
         <p:fade/>
       </p:transition>
@@ -31426,7 +31450,7 @@
         <p159:morph option="byObject"/>
       </p:transition>
     </mc:Choice>
-    <mc:Fallback xmlns="">
+    <mc:Fallback>
       <p:transition>
         <p:fade/>
       </p:transition>
@@ -32649,7 +32673,7 @@
         <p159:morph option="byObject"/>
       </p:transition>
     </mc:Choice>
-    <mc:Fallback xmlns="">
+    <mc:Fallback>
       <p:transition>
         <p:fade/>
       </p:transition>
@@ -35361,7 +35385,7 @@
         <p159:morph option="byObject"/>
       </p:transition>
     </mc:Choice>
-    <mc:Fallback xmlns="">
+    <mc:Fallback>
       <p:transition>
         <p:fade/>
       </p:transition>
@@ -37543,7 +37567,7 @@
         <p159:morph option="byObject"/>
       </p:transition>
     </mc:Choice>
-    <mc:Fallback xmlns="">
+    <mc:Fallback>
       <p:transition>
         <p:fade/>
       </p:transition>
@@ -38650,7 +38674,7 @@
         <p159:morph option="byObject"/>
       </p:transition>
     </mc:Choice>
-    <mc:Fallback xmlns="">
+    <mc:Fallback>
       <p:transition>
         <p:fade/>
       </p:transition>
@@ -40456,7 +40480,7 @@
         <p159:morph option="byObject"/>
       </p:transition>
     </mc:Choice>
-    <mc:Fallback xmlns="">
+    <mc:Fallback>
       <p:transition>
         <p:fade/>
       </p:transition>

--- a/IITBBS_Impact_Dissipating_Crash_Barrier_Internal_Confidential.pptx
+++ b/IITBBS_Impact_Dissipating_Crash_Barrier_Internal_Confidential.pptx
@@ -5472,159 +5472,6 @@
 </p:notes>
 </file>
 
-<file path=ppt/notesSlides/notesSlide20.xml><?xml version="1.0" encoding="utf-8"?>
-<p:notes xmlns:a="http://schemas.openxmlformats.org/drawingml/2006/main" xmlns:p="http://schemas.openxmlformats.org/presentationml/2006/main" xmlns:r="http://schemas.openxmlformats.org/officeDocument/2006/relationships">
-  <p:cSld>
-    <p:spTree>
-      <p:nvGrpSpPr>
-        <p:cNvPr id="1" name=""/>
-        <p:cNvGrpSpPr/>
-        <p:nvPr/>
-      </p:nvGrpSpPr>
-      <p:grpSpPr>
-        <a:xfrm>
-          <a:off x="0" y="0"/>
-          <a:ext cx="0" cy="0"/>
-          <a:chOff x="0" y="0"/>
-          <a:chExt cx="0" cy="0"/>
-        </a:xfrm>
-      </p:grpSpPr>
-      <p:sp>
-        <p:nvSpPr>
-          <p:cNvPr id="2" name="Slide Image Placeholder 1"/>
-          <p:cNvSpPr>
-            <a:spLocks noGrp="1" noRot="1" noChangeAspect="1"/>
-          </p:cNvSpPr>
-          <p:nvPr>
-            <p:ph type="sldImg" idx="2"/>
-          </p:nvPr>
-        </p:nvSpPr>
-        <p:spPr/>
-      </p:sp>
-      <p:sp>
-        <p:nvSpPr>
-          <p:cNvPr id="3" name="Notes Placeholder 2"/>
-          <p:cNvSpPr>
-            <a:spLocks noGrp="1"/>
-          </p:cNvSpPr>
-          <p:nvPr>
-            <p:ph type="body" sz="quarter" idx="3"/>
-          </p:nvPr>
-        </p:nvSpPr>
-        <p:spPr/>
-        <p:txBody>
-          <a:bodyPr/>
-          <a:lstStyle/>
-          <a:p>
-            <a:r>
-              <a:rPr sz="1200" b="0" i="0">
-                <a:solidFill>
-                  <a:srgbClr val="202B33"/>
-                </a:solidFill>
-                <a:latin typeface="Aptos"/>
-              </a:rPr>
-              <a:t>BACKGROUND — approximately 90 seconds</a:t>
-            </a:r>
-          </a:p>
-          <a:p>
-            <a:r>
-              <a:rPr sz="1200" b="0" i="0">
-                <a:solidFill>
-                  <a:srgbClr val="202B33"/>
-                </a:solidFill>
-                <a:latin typeface="Aptos"/>
-              </a:rPr>
-              <a:t/>
-            </a:r>
-          </a:p>
-          <a:p>
-            <a:r>
-              <a:rPr sz="1200" b="0" i="0">
-                <a:solidFill>
-                  <a:srgbClr val="202B33"/>
-                </a:solidFill>
-                <a:latin typeface="Aptos"/>
-              </a:rPr>
-              <a:t>• Band A frames the problem the way the road authority does. IRC:119-2015 classifies safety barriers by how much they deflect: flexible cable systems deflect 1.6 to 2.6 metres and are gentlest on occupants but need a wide median; semi-rigid steel beam systems deflect roughly 0.9 to 1.8 metres; rigid concrete barriers effectively do not deflect at all.</a:t>
-            </a:r>
-          </a:p>
-          <a:p>
-            <a:r>
-              <a:rPr sz="1200" b="0" i="0">
-                <a:solidFill>
-                  <a:srgbClr val="202B33"/>
-                </a:solidFill>
-                <a:latin typeface="Aptos"/>
-              </a:rPr>
-              <a:t>• That is the trade-off the industry has lived with. Rigid concrete is chosen wherever space is tight — narrow medians, urban roads, bridges — and wherever heavy-vehicle containment matters, precisely because it does not deflect. The price paid is the highest occupant impact severity of the three, plus brittle spalling and debris.</a:t>
-            </a:r>
-          </a:p>
-          <a:p>
-            <a:r>
-              <a:rPr sz="1200" b="0" i="0">
-                <a:solidFill>
-                  <a:srgbClr val="202B33"/>
-                </a:solidFill>
-                <a:latin typeface="Aptos"/>
-              </a:rPr>
-              <a:t>• The fourth card is the contribution. We keep the rigid New Jersey geometry, so containment, working width and installation practice are unchanged, but we move the energy dissipation inside the material. Measured at prism scale, failure energy rose 55.3 times; at one-third barrier scale, deformation rose 3.0 times, at 19.4% lower density.</a:t>
-            </a:r>
-          </a:p>
-          <a:p>
-            <a:r>
-              <a:rPr sz="1200" b="0" i="0">
-                <a:solidFill>
-                  <a:srgbClr val="202B33"/>
-                </a:solidFill>
-                <a:latin typeface="Aptos"/>
-              </a:rPr>
-              <a:t>• Band B addresses the binder. Published life-cycle assessments put alkali-activated and geopolymer binders at roughly 146 versus 345 kilograms of CO2-equivalent per cubic metre — about 58% lower — although the literature range is wide, 30 to 80%, and depends heavily on activator dosage and curing. Be honest here: the tested embodiment uses 20% GGBS replacement, which is a partial step on that path, not a full geopolymer. The full alkali-activated barrier binder is the forward research route.</a:t>
-            </a:r>
-          </a:p>
-          <a:p>
-            <a:r>
-              <a:rPr sz="1200" b="0" i="0">
-                <a:solidFill>
-                  <a:srgbClr val="202B33"/>
-                </a:solidFill>
-                <a:latin typeface="Aptos"/>
-              </a:rPr>
-              <a:t>• Band C explains why the aggregate is doing real mechanical work, not just saving weight. Sintered fly-ash aggregate is 16 to 46% lighter than natural coarse aggregate and absorbs 15 to 20% water against about 1%. That absorption is not a defect: it provides internal curing and produces a denser interfacial transition zone. Its vesicular structure crushes progressively under impact, which is the dissipation mechanism.</a:t>
-            </a:r>
-          </a:p>
-          <a:p>
-            <a:r>
-              <a:rPr sz="1200" b="0" i="0">
-                <a:solidFill>
-                  <a:srgbClr val="202B33"/>
-                </a:solidFill>
-                <a:latin typeface="Aptos"/>
-              </a:rPr>
-              <a:t>• Band D is the one-line answer if a committee member asks what is actually new: rigid form with non-rigid response, fragmentation control, a closed by-product loop, and a lighter precast segment.</a:t>
-            </a:r>
-          </a:p>
-        </p:txBody>
-      </p:sp>
-      <p:sp>
-        <p:nvSpPr>
-          <p:cNvPr id="4" name="Slide Number Placeholder 3"/>
-          <p:cNvSpPr>
-            <a:spLocks noGrp="1"/>
-          </p:cNvSpPr>
-          <p:nvPr>
-            <p:ph type="sldNum" sz="quarter" idx="5"/>
-          </p:nvPr>
-        </p:nvSpPr>
-        <p:spPr/>
-      </p:sp>
-    </p:spTree>
-  </p:cSld>
-  <p:clrMapOvr>
-    <a:masterClrMapping/>
-  </p:clrMapOvr>
-</p:notes>
-</file>
-
 <file path=ppt/notesSlides/notesSlide3.xml><?xml version="1.0" encoding="utf-8"?>
 <p:notes xmlns:a="http://schemas.openxmlformats.org/drawingml/2006/main" xmlns:r="http://schemas.openxmlformats.org/officeDocument/2006/relationships" xmlns:p="http://schemas.openxmlformats.org/presentationml/2006/main">
   <p:cSld>
@@ -6280,15 +6127,6 @@
           <a:bodyPr/>
           <a:lstStyle/>
           <a:p>
-            <a:r>
-              <a:rPr sz="1200" b="0" i="0">
-                <a:solidFill>
-                  <a:srgbClr val="202B33"/>
-                </a:solidFill>
-                <a:latin typeface="Aptos"/>
-              </a:rPr>
-              <a:t>EXPERIMENTAL LOGIC — approximately 75 seconds</a:t>
-            </a:r>
             <a:endParaRPr sz="1200" b="0" i="0" dirty="0">
               <a:solidFill>
                 <a:srgbClr val="202B33"/>
@@ -6298,68 +6136,75 @@
           </a:p>
           <a:p>
             <a:r>
-              <a:rPr sz="1200" b="0" i="0">
+              <a:rPr sz="1200" b="0" i="0" dirty="0">
                 <a:solidFill>
                   <a:srgbClr val="202B33"/>
                 </a:solidFill>
                 <a:latin typeface="Aptos"/>
               </a:rPr>
-              <a:t/>
-            </a:r>
-          </a:p>
-          <a:p>
-            <a:r>
-              <a:rPr sz="1200" b="0" i="0">
+              <a:t>• The evidence was built in five layers: constituent characterization, mixture screening, static mechanical tests, repeated drop-weight impact testing and a one-third-scale barrier comparison.</a:t>
+            </a:r>
+          </a:p>
+          <a:p>
+            <a:r>
+              <a:rPr sz="1200" b="0" i="0" dirty="0">
                 <a:solidFill>
                   <a:srgbClr val="202B33"/>
                 </a:solidFill>
                 <a:latin typeface="Aptos"/>
               </a:rPr>
-              <a:t>• The evidence was built in five layers, shown left to right: constituent characterization, mixture design, static mechanical tests, repeated drop-weight impact on prisms, and a one-third-scale barrier comparison. Each photograph is from our own laboratory programme.</a:t>
-            </a:r>
-          </a:p>
-          <a:p>
-            <a:r>
-              <a:rPr sz="1200" b="0" i="0">
+              <a:t>• Four lightweight mixtures were evaluated with </a:t>
+            </a:r>
+            <a:r>
+              <a:rPr sz="1200" b="0" i="0" dirty="0" err="1">
                 <a:solidFill>
                   <a:srgbClr val="202B33"/>
                 </a:solidFill>
                 <a:latin typeface="Aptos"/>
               </a:rPr>
-              <a:t>• Four lightweight mixtures were evaluated with fibre volume increasing from zero to 1.5%, alongside an M40 normal-weight reference.</a:t>
-            </a:r>
-          </a:p>
-          <a:p>
-            <a:r>
-              <a:rPr sz="1200" b="0" i="0">
+              <a:t>fibre</a:t>
+            </a:r>
+            <a:r>
+              <a:rPr sz="1200" b="0" i="0" dirty="0">
                 <a:solidFill>
                   <a:srgbClr val="202B33"/>
                 </a:solidFill>
                 <a:latin typeface="Aptos"/>
               </a:rPr>
-              <a:t>• Static tests set the strength and density boundary. The repeated impact test provides the key post-cracking energy evidence; acceleration signals were processed to derive displacement. The best-performing mixture was then cast as a New Jersey barrier model and compared with NWC under a 40 kg pendulum.</a:t>
-            </a:r>
-          </a:p>
-          <a:p>
-            <a:r>
-              <a:rPr sz="1200" b="0" i="0">
+              <a:t> volume increasing from zero to 1.5%, alongside an M40 normal-weight reference.</a:t>
+            </a:r>
+          </a:p>
+          <a:p>
+            <a:r>
+              <a:rPr sz="1200" b="0" i="0" dirty="0">
                 <a:solidFill>
                   <a:srgbClr val="202B33"/>
                 </a:solidFill>
                 <a:latin typeface="Aptos"/>
               </a:rPr>
-              <a:t>• This is a coherent reduction-to-practice chain and is valuable for enablement. The uncertainty reporting, however, is incomplete: three cubes, three cylinders and four beams were cast per mix, but the impact tables do not report N1/N2 dispersion, and only one barrier per mix was cast.</a:t>
-            </a:r>
-          </a:p>
-          <a:p>
-            <a:r>
-              <a:rPr sz="1200" b="0" i="0">
+              <a:t>• Static tests provide the strength and density boundary. The repeated impact test provides the key post-cracking energy evidence. Acceleration signals were processed to derive displacement. The selected highest-performing mixture was then used in a New Jersey barrier model and compared with NWC.</a:t>
+            </a:r>
+          </a:p>
+          <a:p>
+            <a:r>
+              <a:rPr sz="1200" b="0" i="0" dirty="0">
                 <a:solidFill>
                   <a:srgbClr val="202B33"/>
                 </a:solidFill>
                 <a:latin typeface="Aptos"/>
               </a:rPr>
-              <a:t>• The deck therefore treats measured ratios as experimental observations, not as statistically generalized performance guarantees.</a:t>
+              <a:t>• This is a coherent reduction-to-practice chain and is valuable for enablement. However, the uncertainty reporting is incomplete. The article states that three cubes, three cylinders and four beams were cast per mix, but the impact result tables do not provide N1/N2 dispersion. Only one NWC and one selected lightweight barrier were cast.</a:t>
+            </a:r>
+          </a:p>
+          <a:p>
+            <a:r>
+              <a:rPr sz="1200" b="0" i="0" dirty="0">
+                <a:solidFill>
+                  <a:srgbClr val="202B33"/>
+                </a:solidFill>
+                <a:latin typeface="Aptos"/>
+              </a:rPr>
+              <a:t>• The deck therefore uses measured ratios as experimental observations—not as statistically generalized performance guarantees.</a:t>
             </a:r>
           </a:p>
         </p:txBody>
@@ -10402,6 +10247,30 @@
           </a:p>
         </p:txBody>
       </p:sp>
+      <p:pic>
+        <p:nvPicPr>
+          <p:cNvPr id="15" name="Picture 14" descr="academic_title_barrier_setup.jpg"/>
+          <p:cNvPicPr>
+            <a:picLocks noChangeAspect="1"/>
+          </p:cNvPicPr>
+          <p:nvPr/>
+        </p:nvPicPr>
+        <p:blipFill>
+          <a:blip r:embed="rId4"/>
+          <a:stretch>
+            <a:fillRect/>
+          </a:stretch>
+        </p:blipFill>
+        <p:spPr>
+          <a:xfrm>
+            <a:off x="8101583" y="1124712"/>
+            <a:ext cx="3319272" cy="4151376"/>
+          </a:xfrm>
+          <a:prstGeom prst="rect">
+            <a:avLst/>
+          </a:prstGeom>
+        </p:spPr>
+      </p:pic>
       <p:sp>
         <p:nvSpPr>
           <p:cNvPr id="16" name="TextBox 15"/>
@@ -10430,13 +10299,10 @@
               </a:lnSpc>
             </a:pPr>
             <a:r>
-              <a:rPr sz="1000" b="0">
-                <a:solidFill>
-                  <a:srgbClr val="5D6972"/>
-                </a:solidFill>
-                <a:latin typeface="Aptos"/>
-              </a:rPr>
-              <a:t>Concept visualisation: instrumented energy-dissipating barrier (AI-generated illustration, not experimental data)</a:t>
+              <a:rPr sz="1000" b="0" i="0" dirty="0">
+                <a:latin typeface="Aptos"/>
+              </a:rPr>
+              <a:t>Concept visualisation: instrumented energy-dissipating barrier (AI-generated illustration)</a:t>
             </a:r>
           </a:p>
         </p:txBody>
@@ -10554,30 +10420,6 @@
           </a:p>
         </p:txBody>
       </p:sp>
-      <p:pic>
-        <p:nvPicPr>
-          <p:cNvPr id="21" name="Picture 14" descr="hero_ai.jpg"/>
-          <p:cNvPicPr>
-            <a:picLocks noChangeAspect="1"/>
-          </p:cNvPicPr>
-          <p:nvPr/>
-        </p:nvPicPr>
-        <p:blipFill>
-          <a:blip r:embed="rId5"/>
-          <a:stretch>
-            <a:fillRect/>
-          </a:stretch>
-        </p:blipFill>
-        <p:spPr>
-          <a:xfrm>
-            <a:off x="8101583" y="1124712"/>
-            <a:ext cx="3319272" cy="4151376"/>
-          </a:xfrm>
-          <a:prstGeom prst="rect">
-            <a:avLst/>
-          </a:prstGeom>
-        </p:spPr>
-      </p:pic>
     </p:spTree>
   </p:cSld>
   <p:clrMapOvr>
@@ -10589,7 +10431,7 @@
         <p159:morph option="byObject"/>
       </p:transition>
     </mc:Choice>
-    <mc:Fallback>
+    <mc:Fallback xmlns="">
       <p:transition>
         <p:fade/>
       </p:transition>
@@ -11555,7 +11397,7 @@
         <p159:morph option="byObject"/>
       </p:transition>
     </mc:Choice>
-    <mc:Fallback>
+    <mc:Fallback xmlns="">
       <p:transition>
         <p:fade/>
       </p:transition>
@@ -12797,7 +12639,7 @@
         <p159:morph option="byObject"/>
       </p:transition>
     </mc:Choice>
-    <mc:Fallback>
+    <mc:Fallback xmlns="">
       <p:transition>
         <p:fade/>
       </p:transition>
@@ -13772,7 +13614,7 @@
         <p159:morph option="byObject"/>
       </p:transition>
     </mc:Choice>
-    <mc:Fallback>
+    <mc:Fallback xmlns="">
       <p:transition>
         <p:fade/>
       </p:transition>
@@ -14716,7 +14558,7 @@
         <p159:morph option="byObject"/>
       </p:transition>
     </mc:Choice>
-    <mc:Fallback>
+    <mc:Fallback xmlns="">
       <p:transition>
         <p:fade/>
       </p:transition>
@@ -15901,7 +15743,7 @@
         <p159:morph option="byObject"/>
       </p:transition>
     </mc:Choice>
-    <mc:Fallback>
+    <mc:Fallback xmlns="">
       <p:transition>
         <p:fade/>
       </p:transition>
@@ -17532,7 +17374,7 @@
         <p159:morph option="byObject"/>
       </p:transition>
     </mc:Choice>
-    <mc:Fallback>
+    <mc:Fallback xmlns="">
       <p:transition>
         <p:fade/>
       </p:transition>
@@ -18902,7 +18744,7 @@
         <p159:morph option="byObject"/>
       </p:transition>
     </mc:Choice>
-    <mc:Fallback>
+    <mc:Fallback xmlns="">
       <p:transition>
         <p:fade/>
       </p:transition>
@@ -20199,7 +20041,7 @@
         <p159:morph option="byObject"/>
       </p:transition>
     </mc:Choice>
-    <mc:Fallback>
+    <mc:Fallback xmlns="">
       <p:transition>
         <p:fade/>
       </p:transition>
@@ -21475,7 +21317,7 @@
         <p159:morph option="byObject"/>
       </p:transition>
     </mc:Choice>
-    <mc:Fallback>
+    <mc:Fallback xmlns="">
       <p:transition>
         <p:fade/>
       </p:transition>
@@ -22638,7 +22480,7 @@
         <p159:morph option="byObject"/>
       </p:transition>
     </mc:Choice>
-    <mc:Fallback>
+    <mc:Fallback xmlns="">
       <p:transition>
         <p:fade/>
       </p:transition>
@@ -24330,7 +24172,7 @@
         <p159:morph option="byObject"/>
       </p:transition>
     </mc:Choice>
-    <mc:Fallback>
+    <mc:Fallback xmlns="">
       <p:transition>
         <p:fade/>
       </p:transition>
@@ -24340,7 +24182,7 @@
 </file>
 
 <file path=ppt/slides/slide20.xml><?xml version="1.0" encoding="utf-8"?>
-<p:sld xmlns:a="http://schemas.openxmlformats.org/drawingml/2006/main" xmlns:p="http://schemas.openxmlformats.org/presentationml/2006/main" xmlns:r="http://schemas.openxmlformats.org/officeDocument/2006/relationships">
+<p:sld xmlns:a="http://schemas.openxmlformats.org/drawingml/2006/main" xmlns:r="http://schemas.openxmlformats.org/officeDocument/2006/relationships" xmlns:p="http://schemas.openxmlformats.org/presentationml/2006/main">
   <p:cSld>
     <p:bg>
       <p:bgPr>
@@ -24525,14 +24367,14 @@
       </p:sp>
       <p:pic>
         <p:nvPicPr>
-          <p:cNvPr id="6" name="Picture 5" descr="image.png"/>
+          <p:cNvPr id="6" name="Picture 5" descr="iitbbs_logo_official.png"/>
           <p:cNvPicPr>
             <a:picLocks noChangeAspect="1"/>
           </p:cNvPicPr>
           <p:nvPr/>
         </p:nvPicPr>
         <p:blipFill>
-          <a:blip r:embed="rId2"/>
+          <a:blip r:embed="rId1"/>
           <a:stretch>
             <a:fillRect/>
           </a:stretch>
@@ -28291,6 +28133,18 @@
   <p:clrMapOvr>
     <a:masterClrMapping/>
   </p:clrMapOvr>
+  <mc:AlternateContent xmlns:mc="http://schemas.openxmlformats.org/markup-compatibility/2006" xmlns:p159="http://schemas.microsoft.com/office/powerpoint/2015/09/main">
+    <mc:Choice Requires="p159">
+      <p:transition>
+        <p159:morph option="byObject"/>
+      </p:transition>
+    </mc:Choice>
+    <mc:Fallback xmlns="">
+      <p:transition>
+        <p:fade/>
+      </p:transition>
+    </mc:Fallback>
+  </mc:AlternateContent>
 </p:sld>
 </file>
 
@@ -29703,7 +29557,7 @@
         <p159:morph option="byObject"/>
       </p:transition>
     </mc:Choice>
-    <mc:Fallback>
+    <mc:Fallback xmlns="">
       <p:transition>
         <p:fade/>
       </p:transition>
@@ -31450,7 +31304,7 @@
         <p159:morph option="byObject"/>
       </p:transition>
     </mc:Choice>
-    <mc:Fallback>
+    <mc:Fallback xmlns="">
       <p:transition>
         <p:fade/>
       </p:transition>
@@ -32673,7 +32527,7 @@
         <p159:morph option="byObject"/>
       </p:transition>
     </mc:Choice>
-    <mc:Fallback>
+    <mc:Fallback xmlns="">
       <p:transition>
         <p:fade/>
       </p:transition>
@@ -32709,7 +32563,7 @@
       </p:grpSpPr>
       <p:sp>
         <p:nvSpPr>
-          <p:cNvPr id="45" name="Arrow: Pentagon 44">
+          <p:cNvPr id="2" name="Arrow: Pentagon 44">
             <a:extLst>
               <a:ext uri="{FF2B5EF4-FFF2-40B4-BE49-F238E27FC236}">
                 <a16:creationId xmlns:a16="http://schemas.microsoft.com/office/drawing/2014/main" id="{61C71601-9158-759C-768F-74F3EAEC43EC}"/>
@@ -32756,7 +32610,7 @@
       </p:sp>
       <p:sp>
         <p:nvSpPr>
-          <p:cNvPr id="2" name="Rectangle 1"/>
+          <p:cNvPr id="3" name="Rectangle 1"/>
           <p:cNvSpPr/>
           <p:nvPr/>
         </p:nvSpPr>
@@ -32802,7 +32656,7 @@
       </p:sp>
       <p:sp>
         <p:nvSpPr>
-          <p:cNvPr id="3" name="TextBox 2"/>
+          <p:cNvPr id="4" name="TextBox 2"/>
           <p:cNvSpPr txBox="1"/>
           <p:nvPr/>
         </p:nvSpPr>
@@ -32841,7 +32695,7 @@
       </p:sp>
       <p:sp>
         <p:nvSpPr>
-          <p:cNvPr id="4" name="TextBox 3"/>
+          <p:cNvPr id="5" name="TextBox 3"/>
           <p:cNvSpPr txBox="1"/>
           <p:nvPr/>
         </p:nvSpPr>
@@ -32898,7 +32752,7 @@
       </p:sp>
       <p:sp>
         <p:nvSpPr>
-          <p:cNvPr id="5" name="Rectangle 4"/>
+          <p:cNvPr id="6" name="Rectangle 4"/>
           <p:cNvSpPr/>
           <p:nvPr/>
         </p:nvSpPr>
@@ -32944,14 +32798,14 @@
       </p:sp>
       <p:pic>
         <p:nvPicPr>
-          <p:cNvPr id="6" name="Picture 5" descr="iitbbs_logo_official.png"/>
+          <p:cNvPr id="7" name="Picture 5" descr="iitbbs_logo_official.png"/>
           <p:cNvPicPr>
             <a:picLocks noChangeAspect="1"/>
           </p:cNvPicPr>
           <p:nvPr/>
         </p:nvPicPr>
         <p:blipFill>
-          <a:blip r:embed="rId3"/>
+          <a:blip r:embed="rId1"/>
           <a:stretch>
             <a:fillRect/>
           </a:stretch>
@@ -32968,7 +32822,7 @@
       </p:pic>
       <p:cxnSp>
         <p:nvCxnSpPr>
-          <p:cNvPr id="7" name="Connector 6"/>
+          <p:cNvPr id="8" name="Connector 6"/>
           <p:cNvCxnSpPr/>
           <p:nvPr/>
         </p:nvCxnSpPr>
@@ -33003,7 +32857,7 @@
       </p:cxnSp>
       <p:cxnSp>
         <p:nvCxnSpPr>
-          <p:cNvPr id="8" name="Connector 7"/>
+          <p:cNvPr id="9" name="Connector 7"/>
           <p:cNvCxnSpPr/>
           <p:nvPr/>
         </p:nvCxnSpPr>
@@ -33038,7 +32892,7 @@
       </p:cxnSp>
       <p:sp>
         <p:nvSpPr>
-          <p:cNvPr id="9" name="TextBox 8"/>
+          <p:cNvPr id="10" name="TextBox 8"/>
           <p:cNvSpPr txBox="1"/>
           <p:nvPr/>
         </p:nvSpPr>
@@ -33077,7 +32931,7 @@
       </p:sp>
       <p:sp>
         <p:nvSpPr>
-          <p:cNvPr id="10" name="TextBox 9"/>
+          <p:cNvPr id="11" name="TextBox 9"/>
           <p:cNvSpPr txBox="1"/>
           <p:nvPr/>
         </p:nvSpPr>
@@ -33116,7 +32970,7 @@
       </p:sp>
       <p:sp>
         <p:nvSpPr>
-          <p:cNvPr id="46" name="Rectangle 45"/>
+          <p:cNvPr id="12" name="Rectangle 10"/>
           <p:cNvSpPr/>
           <p:nvPr/>
         </p:nvSpPr>
@@ -33162,7 +33016,7 @@
       </p:sp>
       <p:sp>
         <p:nvSpPr>
-          <p:cNvPr id="47" name="Rectangle 46"/>
+          <p:cNvPr id="13" name="Rectangle 11"/>
           <p:cNvSpPr/>
           <p:nvPr/>
         </p:nvSpPr>
@@ -33206,7 +33060,7 @@
       </p:sp>
       <p:sp>
         <p:nvSpPr>
-          <p:cNvPr id="48" name="Rectangle 47"/>
+          <p:cNvPr id="14" name="Rectangle 12"/>
           <p:cNvSpPr/>
           <p:nvPr/>
         </p:nvSpPr>
@@ -33250,7 +33104,7 @@
       </p:sp>
       <p:sp>
         <p:nvSpPr>
-          <p:cNvPr id="49" name="TextBox 48"/>
+          <p:cNvPr id="15" name="TextBox 13"/>
           <p:cNvSpPr txBox="1"/>
           <p:nvPr/>
         </p:nvSpPr>
@@ -33289,7 +33143,7 @@
       </p:sp>
       <p:sp>
         <p:nvSpPr>
-          <p:cNvPr id="50" name="TextBox 49"/>
+          <p:cNvPr id="16" name="TextBox 14"/>
           <p:cNvSpPr txBox="1"/>
           <p:nvPr/>
         </p:nvSpPr>
@@ -33328,14 +33182,14 @@
       </p:sp>
       <p:pic>
         <p:nvPicPr>
-          <p:cNvPr id="51" name="Picture 50" descr="m_raw.jpg"/>
+          <p:cNvPr id="17" name="Picture 15" descr="m_raw.jpg"/>
           <p:cNvPicPr>
             <a:picLocks noChangeAspect="1"/>
           </p:cNvPicPr>
           <p:nvPr/>
         </p:nvPicPr>
         <p:blipFill>
-          <a:blip r:embed="rId4"/>
+          <a:blip r:embed="rId5"/>
           <a:stretch>
             <a:fillRect/>
           </a:stretch>
@@ -33352,7 +33206,7 @@
       </p:pic>
       <p:sp>
         <p:nvSpPr>
-          <p:cNvPr id="52" name="Rectangle 51"/>
+          <p:cNvPr id="18" name="Rectangle 16"/>
           <p:cNvSpPr/>
           <p:nvPr/>
         </p:nvSpPr>
@@ -33396,7 +33250,7 @@
       </p:sp>
       <p:sp>
         <p:nvSpPr>
-          <p:cNvPr id="53" name="TextBox 52"/>
+          <p:cNvPr id="19" name="TextBox 17"/>
           <p:cNvSpPr txBox="1"/>
           <p:nvPr/>
         </p:nvSpPr>
@@ -33435,7 +33289,7 @@
       </p:sp>
       <p:sp>
         <p:nvSpPr>
-          <p:cNvPr id="54" name="Chevron 53"/>
+          <p:cNvPr id="20" name="Chevron 18"/>
           <p:cNvSpPr/>
           <p:nvPr/>
         </p:nvSpPr>
@@ -33479,7 +33333,7 @@
       </p:sp>
       <p:sp>
         <p:nvSpPr>
-          <p:cNvPr id="55" name="Rectangle 54"/>
+          <p:cNvPr id="21" name="Rectangle 19"/>
           <p:cNvSpPr/>
           <p:nvPr/>
         </p:nvSpPr>
@@ -33525,7 +33379,7 @@
       </p:sp>
       <p:sp>
         <p:nvSpPr>
-          <p:cNvPr id="56" name="Rectangle 55"/>
+          <p:cNvPr id="22" name="Rectangle 20"/>
           <p:cNvSpPr/>
           <p:nvPr/>
         </p:nvSpPr>
@@ -33569,7 +33423,7 @@
       </p:sp>
       <p:sp>
         <p:nvSpPr>
-          <p:cNvPr id="57" name="Rectangle 56"/>
+          <p:cNvPr id="23" name="Rectangle 21"/>
           <p:cNvSpPr/>
           <p:nvPr/>
         </p:nvSpPr>
@@ -33613,7 +33467,7 @@
       </p:sp>
       <p:sp>
         <p:nvSpPr>
-          <p:cNvPr id="58" name="TextBox 57"/>
+          <p:cNvPr id="24" name="TextBox 22"/>
           <p:cNvSpPr txBox="1"/>
           <p:nvPr/>
         </p:nvSpPr>
@@ -33652,7 +33506,7 @@
       </p:sp>
       <p:sp>
         <p:nvSpPr>
-          <p:cNvPr id="59" name="TextBox 58"/>
+          <p:cNvPr id="25" name="TextBox 23"/>
           <p:cNvSpPr txBox="1"/>
           <p:nvPr/>
         </p:nvSpPr>
@@ -33691,14 +33545,14 @@
       </p:sp>
       <p:pic>
         <p:nvPicPr>
-          <p:cNvPr id="60" name="Picture 59" descr="m_mix.jpg"/>
+          <p:cNvPr id="26" name="Picture 24" descr="m_mix.jpg"/>
           <p:cNvPicPr>
             <a:picLocks noChangeAspect="1"/>
           </p:cNvPicPr>
           <p:nvPr/>
         </p:nvPicPr>
         <p:blipFill>
-          <a:blip r:embed="rId5"/>
+          <a:blip r:embed="rId6"/>
           <a:stretch>
             <a:fillRect/>
           </a:stretch>
@@ -33715,7 +33569,7 @@
       </p:pic>
       <p:sp>
         <p:nvSpPr>
-          <p:cNvPr id="61" name="Rectangle 60"/>
+          <p:cNvPr id="27" name="Rectangle 25"/>
           <p:cNvSpPr/>
           <p:nvPr/>
         </p:nvSpPr>
@@ -33759,7 +33613,7 @@
       </p:sp>
       <p:sp>
         <p:nvSpPr>
-          <p:cNvPr id="62" name="TextBox 61"/>
+          <p:cNvPr id="28" name="TextBox 26"/>
           <p:cNvSpPr txBox="1"/>
           <p:nvPr/>
         </p:nvSpPr>
@@ -33798,7 +33652,7 @@
       </p:sp>
       <p:sp>
         <p:nvSpPr>
-          <p:cNvPr id="63" name="Chevron 62"/>
+          <p:cNvPr id="29" name="Chevron 27"/>
           <p:cNvSpPr/>
           <p:nvPr/>
         </p:nvSpPr>
@@ -33842,7 +33696,7 @@
       </p:sp>
       <p:sp>
         <p:nvSpPr>
-          <p:cNvPr id="64" name="Rectangle 63"/>
+          <p:cNvPr id="30" name="Rectangle 28"/>
           <p:cNvSpPr/>
           <p:nvPr/>
         </p:nvSpPr>
@@ -33888,7 +33742,7 @@
       </p:sp>
       <p:sp>
         <p:nvSpPr>
-          <p:cNvPr id="65" name="Rectangle 64"/>
+          <p:cNvPr id="31" name="Rectangle 29"/>
           <p:cNvSpPr/>
           <p:nvPr/>
         </p:nvSpPr>
@@ -33932,7 +33786,7 @@
       </p:sp>
       <p:sp>
         <p:nvSpPr>
-          <p:cNvPr id="66" name="Rectangle 65"/>
+          <p:cNvPr id="32" name="Rectangle 30"/>
           <p:cNvSpPr/>
           <p:nvPr/>
         </p:nvSpPr>
@@ -33976,7 +33830,7 @@
       </p:sp>
       <p:sp>
         <p:nvSpPr>
-          <p:cNvPr id="67" name="TextBox 66"/>
+          <p:cNvPr id="33" name="TextBox 31"/>
           <p:cNvSpPr txBox="1"/>
           <p:nvPr/>
         </p:nvSpPr>
@@ -34015,7 +33869,7 @@
       </p:sp>
       <p:sp>
         <p:nvSpPr>
-          <p:cNvPr id="68" name="TextBox 67"/>
+          <p:cNvPr id="34" name="TextBox 32"/>
           <p:cNvSpPr txBox="1"/>
           <p:nvPr/>
         </p:nvSpPr>
@@ -34054,14 +33908,14 @@
       </p:sp>
       <p:pic>
         <p:nvPicPr>
-          <p:cNvPr id="69" name="Picture 68" descr="m_slump.jpg"/>
+          <p:cNvPr id="35" name="Picture 33" descr="m_slump.jpg"/>
           <p:cNvPicPr>
             <a:picLocks noChangeAspect="1"/>
           </p:cNvPicPr>
           <p:nvPr/>
         </p:nvPicPr>
         <p:blipFill>
-          <a:blip r:embed="rId6"/>
+          <a:blip r:embed="rId7"/>
           <a:stretch>
             <a:fillRect/>
           </a:stretch>
@@ -34078,7 +33932,7 @@
       </p:pic>
       <p:sp>
         <p:nvSpPr>
-          <p:cNvPr id="70" name="Rectangle 69"/>
+          <p:cNvPr id="36" name="Rectangle 34"/>
           <p:cNvSpPr/>
           <p:nvPr/>
         </p:nvSpPr>
@@ -34122,7 +33976,7 @@
       </p:sp>
       <p:sp>
         <p:nvSpPr>
-          <p:cNvPr id="71" name="TextBox 70"/>
+          <p:cNvPr id="37" name="TextBox 35"/>
           <p:cNvSpPr txBox="1"/>
           <p:nvPr/>
         </p:nvSpPr>
@@ -34161,7 +34015,7 @@
       </p:sp>
       <p:sp>
         <p:nvSpPr>
-          <p:cNvPr id="72" name="Chevron 71"/>
+          <p:cNvPr id="38" name="Chevron 36"/>
           <p:cNvSpPr/>
           <p:nvPr/>
         </p:nvSpPr>
@@ -34205,7 +34059,7 @@
       </p:sp>
       <p:sp>
         <p:nvSpPr>
-          <p:cNvPr id="73" name="Rectangle 72"/>
+          <p:cNvPr id="39" name="Rectangle 37"/>
           <p:cNvSpPr/>
           <p:nvPr/>
         </p:nvSpPr>
@@ -34251,7 +34105,7 @@
       </p:sp>
       <p:sp>
         <p:nvSpPr>
-          <p:cNvPr id="74" name="Rectangle 73"/>
+          <p:cNvPr id="40" name="Rectangle 38"/>
           <p:cNvSpPr/>
           <p:nvPr/>
         </p:nvSpPr>
@@ -34295,7 +34149,7 @@
       </p:sp>
       <p:sp>
         <p:nvSpPr>
-          <p:cNvPr id="75" name="Rectangle 74"/>
+          <p:cNvPr id="41" name="Rectangle 39"/>
           <p:cNvSpPr/>
           <p:nvPr/>
         </p:nvSpPr>
@@ -34339,7 +34193,7 @@
       </p:sp>
       <p:sp>
         <p:nvSpPr>
-          <p:cNvPr id="76" name="TextBox 75"/>
+          <p:cNvPr id="42" name="TextBox 40"/>
           <p:cNvSpPr txBox="1"/>
           <p:nvPr/>
         </p:nvSpPr>
@@ -34378,7 +34232,7 @@
       </p:sp>
       <p:sp>
         <p:nvSpPr>
-          <p:cNvPr id="77" name="TextBox 76"/>
+          <p:cNvPr id="43" name="TextBox 41"/>
           <p:cNvSpPr txBox="1"/>
           <p:nvPr/>
         </p:nvSpPr>
@@ -34417,14 +34271,14 @@
       </p:sp>
       <p:pic>
         <p:nvPicPr>
-          <p:cNvPr id="78" name="Picture 77" descr="m_prism.jpg"/>
+          <p:cNvPr id="44" name="Picture 42" descr="m_prism.jpg"/>
           <p:cNvPicPr>
             <a:picLocks noChangeAspect="1"/>
           </p:cNvPicPr>
           <p:nvPr/>
         </p:nvPicPr>
         <p:blipFill>
-          <a:blip r:embed="rId7"/>
+          <a:blip r:embed="rId8"/>
           <a:stretch>
             <a:fillRect/>
           </a:stretch>
@@ -34441,7 +34295,7 @@
       </p:pic>
       <p:sp>
         <p:nvSpPr>
-          <p:cNvPr id="79" name="Rectangle 78"/>
+          <p:cNvPr id="45" name="Rectangle 43"/>
           <p:cNvSpPr/>
           <p:nvPr/>
         </p:nvSpPr>
@@ -34485,7 +34339,7 @@
       </p:sp>
       <p:sp>
         <p:nvSpPr>
-          <p:cNvPr id="80" name="TextBox 79"/>
+          <p:cNvPr id="46" name="TextBox 44"/>
           <p:cNvSpPr txBox="1"/>
           <p:nvPr/>
         </p:nvSpPr>
@@ -34524,7 +34378,7 @@
       </p:sp>
       <p:sp>
         <p:nvSpPr>
-          <p:cNvPr id="81" name="Chevron 80"/>
+          <p:cNvPr id="47" name="Chevron 45"/>
           <p:cNvSpPr/>
           <p:nvPr/>
         </p:nvSpPr>
@@ -34568,7 +34422,7 @@
       </p:sp>
       <p:sp>
         <p:nvSpPr>
-          <p:cNvPr id="82" name="Rectangle 81"/>
+          <p:cNvPr id="48" name="Rectangle 46"/>
           <p:cNvSpPr/>
           <p:nvPr/>
         </p:nvSpPr>
@@ -34614,7 +34468,7 @@
       </p:sp>
       <p:sp>
         <p:nvSpPr>
-          <p:cNvPr id="83" name="Rectangle 82"/>
+          <p:cNvPr id="49" name="Rectangle 47"/>
           <p:cNvSpPr/>
           <p:nvPr/>
         </p:nvSpPr>
@@ -34658,7 +34512,7 @@
       </p:sp>
       <p:sp>
         <p:nvSpPr>
-          <p:cNvPr id="84" name="Rectangle 83"/>
+          <p:cNvPr id="50" name="Rectangle 48"/>
           <p:cNvSpPr/>
           <p:nvPr/>
         </p:nvSpPr>
@@ -34702,7 +34556,7 @@
       </p:sp>
       <p:sp>
         <p:nvSpPr>
-          <p:cNvPr id="85" name="TextBox 84"/>
+          <p:cNvPr id="51" name="TextBox 49"/>
           <p:cNvSpPr txBox="1"/>
           <p:nvPr/>
         </p:nvSpPr>
@@ -34741,7 +34595,7 @@
       </p:sp>
       <p:sp>
         <p:nvSpPr>
-          <p:cNvPr id="86" name="TextBox 85"/>
+          <p:cNvPr id="52" name="TextBox 50"/>
           <p:cNvSpPr txBox="1"/>
           <p:nvPr/>
         </p:nvSpPr>
@@ -34780,14 +34634,14 @@
       </p:sp>
       <p:pic>
         <p:nvPicPr>
-          <p:cNvPr id="87" name="Picture 86" descr="m_barrier.jpg"/>
+          <p:cNvPr id="53" name="Picture 51" descr="m_barrier.jpg"/>
           <p:cNvPicPr>
             <a:picLocks noChangeAspect="1"/>
           </p:cNvPicPr>
           <p:nvPr/>
         </p:nvPicPr>
         <p:blipFill>
-          <a:blip r:embed="rId8"/>
+          <a:blip r:embed="rId9"/>
           <a:stretch>
             <a:fillRect/>
           </a:stretch>
@@ -34804,7 +34658,7 @@
       </p:pic>
       <p:sp>
         <p:nvSpPr>
-          <p:cNvPr id="88" name="Rectangle 87"/>
+          <p:cNvPr id="54" name="Rectangle 52"/>
           <p:cNvSpPr/>
           <p:nvPr/>
         </p:nvSpPr>
@@ -34848,7 +34702,7 @@
       </p:sp>
       <p:sp>
         <p:nvSpPr>
-          <p:cNvPr id="89" name="TextBox 88"/>
+          <p:cNvPr id="55" name="TextBox 53"/>
           <p:cNvSpPr txBox="1"/>
           <p:nvPr/>
         </p:nvSpPr>
@@ -34887,7 +34741,7 @@
       </p:sp>
       <p:graphicFrame>
         <p:nvGraphicFramePr>
-          <p:cNvPr id="90" name="Table 89"/>
+          <p:cNvPr id="56" name="Table 54"/>
           <p:cNvGraphicFramePr>
             <a:graphicFrameLocks noGrp="1"/>
           </p:cNvGraphicFramePr>
@@ -35291,7 +35145,7 @@
       </p:graphicFrame>
       <p:sp>
         <p:nvSpPr>
-          <p:cNvPr id="91" name="Rectangle 90"/>
+          <p:cNvPr id="57" name="Rectangle 55"/>
           <p:cNvSpPr/>
           <p:nvPr/>
         </p:nvSpPr>
@@ -35337,7 +35191,7 @@
       </p:sp>
       <p:sp>
         <p:nvSpPr>
-          <p:cNvPr id="92" name="TextBox 91"/>
+          <p:cNvPr id="58" name="TextBox 56"/>
           <p:cNvSpPr txBox="1"/>
           <p:nvPr/>
         </p:nvSpPr>
@@ -35385,7 +35239,7 @@
         <p159:morph option="byObject"/>
       </p:transition>
     </mc:Choice>
-    <mc:Fallback>
+    <mc:Fallback xmlns="">
       <p:transition>
         <p:fade/>
       </p:transition>
@@ -37567,7 +37421,7 @@
         <p159:morph option="byObject"/>
       </p:transition>
     </mc:Choice>
-    <mc:Fallback>
+    <mc:Fallback xmlns="">
       <p:transition>
         <p:fade/>
       </p:transition>
@@ -38674,7 +38528,7 @@
         <p159:morph option="byObject"/>
       </p:transition>
     </mc:Choice>
-    <mc:Fallback>
+    <mc:Fallback xmlns="">
       <p:transition>
         <p:fade/>
       </p:transition>
@@ -40480,7 +40334,7 @@
         <p159:morph option="byObject"/>
       </p:transition>
     </mc:Choice>
-    <mc:Fallback>
+    <mc:Fallback xmlns="">
       <p:transition>
         <p:fade/>
       </p:transition>
